--- a/Architecture_Docs/Architecture_Overview.pptx
+++ b/Architecture_Docs/Architecture_Overview.pptx
@@ -3306,7 +3306,7 @@
                 </a:solidFill>
                 <a:latin typeface="Calibri"/>
               </a:rPr>
-              <a:t>Circuvent Technologies · Architecture &amp; Technical Audit · 2026-08-19</a:t>
+              <a:t>Circuvent Technologies · Architecture &amp; Technical Audit · 2026-08-20</a:t>
             </a:r>
           </a:p>
         </p:txBody>
@@ -3999,7 +3999,7 @@
                 </a:solidFill>
                 <a:latin typeface="Calibri"/>
               </a:rPr>
-              <a:t>Circuvent Technologies · Architecture &amp; Technical Audit · 2026-08-19</a:t>
+              <a:t>Circuvent Technologies · Architecture &amp; Technical Audit · 2026-08-20</a:t>
             </a:r>
           </a:p>
         </p:txBody>
@@ -4609,7 +4609,7 @@
                 </a:solidFill>
                 <a:latin typeface="Calibri"/>
               </a:rPr>
-              <a:t>Circuvent Technologies · Architecture &amp; Technical Audit · 2026-08-19</a:t>
+              <a:t>Circuvent Technologies · Architecture &amp; Technical Audit · 2026-08-20</a:t>
             </a:r>
           </a:p>
         </p:txBody>
@@ -5219,7 +5219,7 @@
                 </a:solidFill>
                 <a:latin typeface="Calibri"/>
               </a:rPr>
-              <a:t>Circuvent Technologies · Architecture &amp; Technical Audit · 2026-08-19</a:t>
+              <a:t>Circuvent Technologies · Architecture &amp; Technical Audit · 2026-08-20</a:t>
             </a:r>
           </a:p>
         </p:txBody>
@@ -5912,7 +5912,7 @@
                 </a:solidFill>
                 <a:latin typeface="Calibri"/>
               </a:rPr>
-              <a:t>Circuvent Technologies · Architecture &amp; Technical Audit · 2026-08-19</a:t>
+              <a:t>Circuvent Technologies · Architecture &amp; Technical Audit · 2026-08-20</a:t>
             </a:r>
           </a:p>
         </p:txBody>
@@ -6605,7 +6605,7 @@
                 </a:solidFill>
                 <a:latin typeface="Calibri"/>
               </a:rPr>
-              <a:t>Circuvent Technologies · Architecture &amp; Technical Audit · 2026-08-19</a:t>
+              <a:t>Circuvent Technologies · Architecture &amp; Technical Audit · 2026-08-20</a:t>
             </a:r>
           </a:p>
         </p:txBody>
@@ -8156,7 +8156,7 @@
                 </a:solidFill>
                 <a:latin typeface="Calibri"/>
               </a:rPr>
-              <a:t>Circuvent Technologies · Architecture &amp; Technical Audit · 2026-08-19</a:t>
+              <a:t>Circuvent Technologies · Architecture &amp; Technical Audit · 2026-08-20</a:t>
             </a:r>
           </a:p>
         </p:txBody>
@@ -13509,7 +13509,7 @@
                 </a:solidFill>
                 <a:latin typeface="Calibri"/>
               </a:rPr>
-              <a:t>Circuvent Technologies · Architecture &amp; Technical Audit · 2026-08-19</a:t>
+              <a:t>Circuvent Technologies · Architecture &amp; Technical Audit · 2026-08-20</a:t>
             </a:r>
           </a:p>
         </p:txBody>
@@ -14202,7 +14202,7 @@
                 </a:solidFill>
                 <a:latin typeface="Calibri"/>
               </a:rPr>
-              <a:t>Circuvent Technologies · Architecture &amp; Technical Audit · 2026-08-19</a:t>
+              <a:t>Circuvent Technologies · Architecture &amp; Technical Audit · 2026-08-20</a:t>
             </a:r>
           </a:p>
         </p:txBody>
@@ -15396,7 +15396,7 @@
                 </a:solidFill>
                 <a:latin typeface="Calibri"/>
               </a:rPr>
-              <a:t>Circuvent Technologies · Architecture &amp; Technical Audit · 2026-08-19</a:t>
+              <a:t>Circuvent Technologies · Architecture &amp; Technical Audit · 2026-08-20</a:t>
             </a:r>
           </a:p>
         </p:txBody>
@@ -16172,7 +16172,7 @@
                 </a:solidFill>
                 <a:latin typeface="Calibri"/>
               </a:rPr>
-              <a:t>Circuvent Technologies · Architecture &amp; Technical Audit · 2026-08-19</a:t>
+              <a:t>Circuvent Technologies · Architecture &amp; Technical Audit · 2026-08-20</a:t>
             </a:r>
           </a:p>
         </p:txBody>
@@ -16553,7 +16553,7 @@
                 </a:solidFill>
                 <a:latin typeface="Calibri"/>
               </a:rPr>
-              <a:t>Circuvent Technologies · Architecture &amp; Technical Audit · 2026-08-19</a:t>
+              <a:t>Circuvent Technologies · Architecture &amp; Technical Audit · 2026-08-20</a:t>
             </a:r>
           </a:p>
         </p:txBody>
@@ -18104,7 +18104,7 @@
                 </a:solidFill>
                 <a:latin typeface="Calibri"/>
               </a:rPr>
-              <a:t>Circuvent Technologies · Architecture &amp; Technical Audit · 2026-08-19</a:t>
+              <a:t>Circuvent Technologies · Architecture &amp; Technical Audit · 2026-08-20</a:t>
             </a:r>
           </a:p>
         </p:txBody>
@@ -19304,7 +19304,7 @@
                 </a:solidFill>
                 <a:latin typeface="Calibri"/>
               </a:rPr>
-              <a:t>Circuvent Technologies · Architecture &amp; Technical Audit · 2026-08-19</a:t>
+              <a:t>Circuvent Technologies · Architecture &amp; Technical Audit · 2026-08-20</a:t>
             </a:r>
           </a:p>
         </p:txBody>
@@ -19997,7 +19997,7 @@
                 </a:solidFill>
                 <a:latin typeface="Calibri"/>
               </a:rPr>
-              <a:t>Circuvent Technologies · Architecture &amp; Technical Audit · 2026-08-19</a:t>
+              <a:t>Circuvent Technologies · Architecture &amp; Technical Audit · 2026-08-20</a:t>
             </a:r>
           </a:p>
         </p:txBody>
@@ -20594,7 +20594,7 @@
                 </a:solidFill>
                 <a:latin typeface="Calibri"/>
               </a:rPr>
-              <a:t>Circuvent Technologies · Architecture &amp; Technical Audit · 2026-08-19</a:t>
+              <a:t>Circuvent Technologies · Architecture &amp; Technical Audit · 2026-08-20</a:t>
             </a:r>
           </a:p>
         </p:txBody>
@@ -22233,7 +22233,7 @@
                 </a:solidFill>
                 <a:latin typeface="Calibri"/>
               </a:rPr>
-              <a:t>Circuvent Technologies · Architecture &amp; Technical Audit · 2026-08-19</a:t>
+              <a:t>Circuvent Technologies · Architecture &amp; Technical Audit · 2026-08-20</a:t>
             </a:r>
           </a:p>
         </p:txBody>
@@ -22926,7 +22926,7 @@
                 </a:solidFill>
                 <a:latin typeface="Calibri"/>
               </a:rPr>
-              <a:t>Circuvent Technologies · Architecture &amp; Technical Audit · 2026-08-19</a:t>
+              <a:t>Circuvent Technologies · Architecture &amp; Technical Audit · 2026-08-20</a:t>
             </a:r>
           </a:p>
         </p:txBody>
@@ -23619,7 +23619,7 @@
                 </a:solidFill>
                 <a:latin typeface="Calibri"/>
               </a:rPr>
-              <a:t>Circuvent Technologies · Architecture &amp; Technical Audit · 2026-08-19</a:t>
+              <a:t>Circuvent Technologies · Architecture &amp; Technical Audit · 2026-08-20</a:t>
             </a:r>
           </a:p>
         </p:txBody>
